--- a/Verification/Presenations/TX_Path_Verification_Plan.pptx
+++ b/Verification/Presenations/TX_Path_Verification_Plan.pptx
@@ -4410,7 +4410,23 @@
                   <a:srgbClr val="C8D8F0"/>
                 </a:solidFill>
               </a:rPr>
-              <a:t>Assert rst_n = 0 for 10 cycles, then release. Immediately send a full frame. Capture tx_out and compute EVM.</a:t>
+              <a:t>Assert rst_n = 0 for 10 cycles, then release. Immediately send a full frame. Capture </a:t>
+            </a:r>
+            <a:r>
+              <a:rPr lang="en-US" sz="850" dirty="0" err="1">
+                <a:solidFill>
+                  <a:srgbClr val="C8D8F0"/>
+                </a:solidFill>
+              </a:rPr>
+              <a:t>tx_out</a:t>
+            </a:r>
+            <a:r>
+              <a:rPr lang="en-US" sz="850" dirty="0">
+                <a:solidFill>
+                  <a:srgbClr val="C8D8F0"/>
+                </a:solidFill>
+              </a:rPr>
+              <a:t> .</a:t>
             </a:r>
             <a:endParaRPr lang="en-US" sz="850" dirty="0"/>
           </a:p>
@@ -4482,7 +4498,7 @@
                   <a:srgbClr val="FFFFFF"/>
                 </a:solidFill>
               </a:rPr>
-              <a:t>tx_out = 0 during reset assertion. EVM &lt; 3% for the first post-reset frame.</a:t>
+              <a:t>tx_out = 0 during reset assertion.</a:t>
             </a:r>
             <a:endParaRPr lang="en-US" sz="850" dirty="0"/>
           </a:p>
@@ -4881,7 +4897,7 @@
                   <a:srgbClr val="FFFFFF"/>
                 </a:solidFill>
               </a:rPr>
-              <a:t>tx_out goes to 0 immediately on reset assertion. New full-frame EVM &lt; 3%.</a:t>
+              <a:t>tx_out goes to 0 immediately on reset assertion.</a:t>
             </a:r>
             <a:endParaRPr lang="en-US" sz="850" dirty="0"/>
           </a:p>
@@ -5192,7 +5208,7 @@
                   <a:srgbClr val="C8D8F0"/>
                 </a:solidFill>
               </a:rPr>
-              <a:t>Assert and release rst_n 5 times consecutively with no frames in between. Then send a frame. Compute EVM.</a:t>
+              <a:t>Assert and release rst_n 5 times consecutively with no frames in between. Then send a frame. </a:t>
             </a:r>
             <a:endParaRPr lang="en-US" sz="850" dirty="0"/>
           </a:p>
@@ -5264,7 +5280,7 @@
                   <a:srgbClr val="FFFFFF"/>
                 </a:solidFill>
               </a:rPr>
-              <a:t>EVM &lt; 3%. No accumulated state from repeated resets corrupts the output.</a:t>
+              <a:t> No accumulated state from repeated resets corrupts the output.</a:t>
             </a:r>
             <a:endParaRPr lang="en-US" sz="850" dirty="0"/>
           </a:p>
@@ -5936,7 +5952,7 @@
                   <a:srgbClr val="FFFFFF"/>
                 </a:solidFill>
               </a:rPr>
-              <a:t>EVM &lt; 3% for every one of the 20 frames. No inter-frame contamination observable at tx_out.</a:t>
+              <a:t>For every one of the 20 frames  No inter-frame contamination observable at tx_out.</a:t>
             </a:r>
             <a:endParaRPr lang="en-US" sz="850" dirty="0"/>
           </a:p>
@@ -6353,7 +6369,7 @@
                   <a:srgbClr val="FFFFFF"/>
                 </a:solidFill>
               </a:rPr>
-              <a:t>Frame 2 EVM &lt; 3%. No stale pipeline state from frame 1 corrupts frame 2.</a:t>
+              <a:t>Frame 2 no stale pipeline state from frame 1 corrupts frame 2.</a:t>
             </a:r>
             <a:endParaRPr lang="en-US" sz="850" dirty="0"/>
           </a:p>
@@ -6770,7 +6786,7 @@
                   <a:srgbClr val="FFFFFF"/>
                 </a:solidFill>
               </a:rPr>
-              <a:t>EVM &lt; 3% for all 100 frames, both chirp and OFDM bands independently.</a:t>
+              <a:t>For all 100 frames, both chirp and OFDM bands independently.</a:t>
             </a:r>
             <a:endParaRPr lang="en-US" sz="850" dirty="0"/>
           </a:p>
@@ -7403,7 +7419,7 @@
                   <a:srgbClr val="C8D8F0"/>
                 </a:solidFill>
               </a:rPr>
-              <a:t>Black-box TX wrapper · 14 test cases · Single active agent · EVM &lt; 3% vs MATLAB golden</a:t>
+              <a:t>Black-box TX wrapper · 14 test cases · Single active agent vs Python golden</a:t>
             </a:r>
             <a:endParaRPr lang="en-US" sz="800" dirty="0"/>
           </a:p>
@@ -18134,11 +18150,11 @@
             <a:avLst/>
           </a:prstGeom>
           <a:solidFill>
-            <a:srgbClr val="1A5A4A"/>
+            <a:srgbClr val="1A4A7A"/>
           </a:solidFill>
           <a:ln w="12700">
             <a:solidFill>
-              <a:srgbClr val="1A5A4A"/>
+              <a:srgbClr val="1A4A7A"/>
             </a:solidFill>
             <a:prstDash val="solid"/>
           </a:ln>
@@ -18481,11 +18497,11 @@
             <a:avLst/>
           </a:prstGeom>
           <a:solidFill>
-            <a:srgbClr val="1A5A4A"/>
+            <a:srgbClr val="1A4A7A"/>
           </a:solidFill>
           <a:ln w="12700">
             <a:solidFill>
-              <a:srgbClr val="1A5A4A"/>
+              <a:srgbClr val="1A4A7A"/>
             </a:solidFill>
             <a:prstDash val="solid"/>
           </a:ln>
@@ -18567,7 +18583,7 @@
                   <a:srgbClr val="FFFFFF"/>
                 </a:solidFill>
               </a:rPr>
-              <a:t>Full M_dds Sweep — 0 to 1023</a:t>
+              <a:t>Full M_dds Sweep — 0 to full range</a:t>
             </a:r>
             <a:endParaRPr lang="en-US" sz="900" dirty="0"/>
           </a:p>
@@ -18675,7 +18691,7 @@
                   <a:srgbClr val="C8D8F0"/>
                 </a:solidFill>
               </a:rPr>
-              <a:t>Apply M_dds linearly from 0 to 1023 across 4096 samples (full chirp sweep). Zero OFDM.</a:t>
+              <a:t>Apply M_dds linearly from 0 to full range across 4096 samples (full chirp sweep). Zero OFDM.</a:t>
             </a:r>
             <a:endParaRPr lang="en-US" sz="750" dirty="0"/>
           </a:p>

--- a/Verification/Presenations/TX_Path_Verification_Plan.pptx
+++ b/Verification/Presenations/TX_Path_Verification_Plan.pptx
@@ -3455,7 +3455,15 @@
                   <a:srgbClr val="FFFFFF"/>
                 </a:solidFill>
               </a:rPr>
-              <a:t>If any sample hits ±32767, the next sample must NOT jump to the opposite extreme (no wrap-around). EVM not required for saturation edge.</a:t>
+              <a:t>If any sample hits ±32767, the next sample must NOT jump to the opposite extreme (no wrap-around</a:t>
+            </a:r>
+            <a:r>
+              <a:rPr lang="en-US" sz="850">
+                <a:solidFill>
+                  <a:srgbClr val="FFFFFF"/>
+                </a:solidFill>
+              </a:rPr>
+              <a:t>). </a:t>
             </a:r>
             <a:endParaRPr lang="en-US" sz="850" dirty="0"/>
           </a:p>
